--- a/Harmony Innovation Summit 2026 - SafeMesh.pptx
+++ b/Harmony Innovation Summit 2026 - SafeMesh.pptx
@@ -515,22 +515,17 @@
           </a:p>
           <a:p>
             <a:r>
-              <a:t>My name is Tomasz Kisiel. I am from Carrotly, a software team from Kraków, in Poland. At HackYeah we built SafeMesh, and we won second place in the Huawei challenge.</a:t>
+              <a:t>My name is Tomasz, and I represent Carrotly, a team of creative engineers from Kraków, in Poland. At the HackYeah hackathon we built SafeMesh, and it won second place in the Huawei challenge. But what is SafeMesh?</a:t>
             </a:r>
           </a:p>
           <a:p>
             <a:r>
-              <a:t>Imagine a crisis in a city: a flood, a blackout, or an attack. The cell towers go down, and your phone shows "no service". This is exactly the moment when people need a warning. But emergency alerts come through the mobile network. Without towers, they cannot arrive.</a:t>
+              <a:t>Imagine a crisis in your city: a flood, a blackout, or a drone strike. The cell towers go down, and your phone shows only one thing: "no service". In a critical situation without clear guidance, people panic, rumours spread, and everything quickly turns into chaos. This is exactly when we need a reliable emergency alert system. But today, government alerts mostly come through the mobile network. Without towers, they cannot arrive.</a:t>
             </a:r>
           </a:p>
           <a:p>
             <a:r>
-              <a:t>SafeMesh solves this. An official issuer signs a warning. Phone A receives it and passes it to phone B over NearLink, with no network at all. Then B walks on, and later passes it to phone C. C was never near the source, but it still gets the warning.</a:t>
-            </a:r>
-          </a:p>
-          <a:p>
-            <a:r>
-              <a:t>And every phone checks the signature by itself. If someone changes even one letter, the phone rejects the message and does not pass it on. So fake news cannot travel through SafeMesh.</a:t>
+              <a:t>SafeMesh solves this. With our application, an official issuer can send a digitally signed warning to the devices in range, using NearLink. Phone A receives it and passes it to the devices in its own range, like phone B. Then B passes it further to C. Every phone checks the signature by itself. If someone changes even one bit of the message, the signature breaks, and the phone rejects it and drops it from the network. C was never near the source, yet it still gets a warning it can trust.</a:t>
             </a:r>
           </a:p>
         </p:txBody>
@@ -600,22 +595,17 @@
           <a:lstStyle/>
           <a:p>
             <a:r>
-              <a:t>We built SafeMesh in twenty-four hours, as a native HarmonyOS app. It has three parts. Signed alerts, checked on the phone with the Crypto Architecture Kit. A phone-to-phone relay, with a NearLink Kit adapter. And an offline map with forty protective points in Kraków.</a:t>
+              <a:t>We built SafeMesh in twenty-four hours, as a native HarmonyOS app. It has three parts. Signed alerts, checked on the phone with the Crypto Architecture Kit. A phone-to-phone relay, with a NearLink Kit adapter. And an offline map with protective points near the user's location.</a:t>
             </a:r>
           </a:p>
           <a:p>
             <a:r>
-              <a:t>We showed the full relay, from A to B to C, on three HarmonyOS emulators. The same code also builds for OpenHarmony, and runs on the Eclipse Oniro emulator.</a:t>
+              <a:t>Our next step would be to extend SafeMesh beyond NearLink, to Bluetooth and Wi-Fi, and to test NearLink on real phones. We would be very happy to do it together with Huawei.</a:t>
             </a:r>
           </a:p>
           <a:p>
             <a:r>
-              <a:t>Our next step is the first test on real NearLink phones. We would be very happy to do it together with Huawei.</a:t>
-            </a:r>
-          </a:p>
-          <a:p>
-            <a:r>
-              <a:t>Your motto this year is "Better Together". This is exactly how SafeMesh works. One phone alone cannot reach everyone. But together, they can.</a:t>
+              <a:t>With SafeMesh, even when the network fails, the warning still arrives.</a:t>
             </a:r>
           </a:p>
           <a:p>
